--- a/assets/powerpoints/module-n1-presenter/C1-bonjour-merci-pardon.pptx
+++ b/assets/powerpoints/module-n1-presenter/C1-bonjour-merci-pardon.pptx
@@ -12031,7 +12031,61 @@
                 </a:solidFill>
                 <a:latin typeface="Verdana"/>
               </a:rPr>
-              <a:t>On dit merci pour presque tout. La réponse est « &lt;b&gt;de rien&lt;/b&gt; », « &lt;b&gt;bienvenue&lt;/b&gt; » ou « &lt;b&gt;ça me fait plaisir&lt;/b&gt; ». Attention : au Québec, « bienvenue » après un merci ne veut pas dire « entrez » — cela veut dire « de rien ».</a:t>
+              <a:t>On dit merci pour presque tout. La réponse est « </a:t>
+            </a:r>
+            <a:r>
+              <a:rPr sz="2000" b="1" i="0">
+                <a:solidFill>
+                  <a:srgbClr val="4B4F52"/>
+                </a:solidFill>
+                <a:latin typeface="Verdana"/>
+              </a:rPr>
+              <a:t>de rien</a:t>
+            </a:r>
+            <a:r>
+              <a:rPr sz="2000" b="0" i="0">
+                <a:solidFill>
+                  <a:srgbClr val="4B4F52"/>
+                </a:solidFill>
+                <a:latin typeface="Verdana"/>
+              </a:rPr>
+              <a:t> », « </a:t>
+            </a:r>
+            <a:r>
+              <a:rPr sz="2000" b="1" i="0">
+                <a:solidFill>
+                  <a:srgbClr val="4B4F52"/>
+                </a:solidFill>
+                <a:latin typeface="Verdana"/>
+              </a:rPr>
+              <a:t>bienvenue</a:t>
+            </a:r>
+            <a:r>
+              <a:rPr sz="2000" b="0" i="0">
+                <a:solidFill>
+                  <a:srgbClr val="4B4F52"/>
+                </a:solidFill>
+                <a:latin typeface="Verdana"/>
+              </a:rPr>
+              <a:t> » ou « </a:t>
+            </a:r>
+            <a:r>
+              <a:rPr sz="2000" b="1" i="0">
+                <a:solidFill>
+                  <a:srgbClr val="4B4F52"/>
+                </a:solidFill>
+                <a:latin typeface="Verdana"/>
+              </a:rPr>
+              <a:t>ça me fait plaisir</a:t>
+            </a:r>
+            <a:r>
+              <a:rPr sz="2000" b="0" i="0">
+                <a:solidFill>
+                  <a:srgbClr val="4B4F52"/>
+                </a:solidFill>
+                <a:latin typeface="Verdana"/>
+              </a:rPr>
+              <a:t> ». Attention : au Québec, « bienvenue » après un merci ne veut pas dire « entrez » — cela veut dire « de rien ».</a:t>
             </a:r>
           </a:p>
         </p:txBody>
@@ -12378,7 +12432,25 @@
                 </a:solidFill>
                 <a:latin typeface="Verdana"/>
               </a:rPr>
-              <a:t>Ce n'est pas un aveu d'échec. Tout le monde la dit, même les gens nés ici quand il y a du bruit. Et la meilleure suite est : « &lt;b&gt;plus lentement, s'il vous plaît&lt;/b&gt; » — parce que le problème est presque toujours la vitesse, pas le volume.</a:t>
+              <a:t>Ce n'est pas un aveu d'échec. Tout le monde la dit, même les gens nés ici quand il y a du bruit. Et la meilleure suite est : « </a:t>
+            </a:r>
+            <a:r>
+              <a:rPr sz="2000" b="1" i="0">
+                <a:solidFill>
+                  <a:srgbClr val="4B4F52"/>
+                </a:solidFill>
+                <a:latin typeface="Verdana"/>
+              </a:rPr>
+              <a:t>plus lentement, s'il vous plaît</a:t>
+            </a:r>
+            <a:r>
+              <a:rPr sz="2000" b="0" i="0">
+                <a:solidFill>
+                  <a:srgbClr val="4B4F52"/>
+                </a:solidFill>
+                <a:latin typeface="Verdana"/>
+              </a:rPr>
+              <a:t> » — parce que le problème est presque toujours la vitesse, pas le volume.</a:t>
             </a:r>
           </a:p>
         </p:txBody>
